--- a/slides/영유아교육과정의_이해.pptx
+++ b/slides/영유아교육과정의_이해.pptx
@@ -507,7 +507,9 @@
           <a:p>
             <a:r>
               <a:rPr lang="en-US" dirty="0"/>
-              <a:t>안녕하세요. 오늘은 5장 교육과정의 계획과 운영 중에서 "영유아교육과정의 이해"를 발표하겠습니다. 교육과정이 무엇인지 정의를 먼저 살펴보고, 유치원의 누리과정과 어린이집의 표준보육과정이 어떻게 변해 왔는지, 그리고 2019 개정 누리과정의 핵심 방향을 차례로 말씀드리겠습니다.</a:t>
+              <a:t>안녕하세요. 오늘 제가 발표할 내용은 '영유아교육과정의 이해'입니다.
+쉽게 말하면, 유치원과 어린이집에서 아이들에게 '무엇을, 어떻게 가르칠지' 정해 놓은 계획에 대한 이야기예요.
+먼저 교육과정이 무슨 뜻인지 알아보고, 유치원과 어린이집의 교육과정이 어떻게 바뀌어 왔는지 살펴본 뒤, 마지막으로 요즘 누리과정이 어떤 방향인지 말씀드리겠습니다.</a:t>
             </a:r>
             <a:endParaRPr lang="en-US" dirty="0"/>
           </a:p>
@@ -595,10 +597,10 @@
           <a:p>
             <a:r>
               <a:rPr lang="en-US" dirty="0"/>
-              <a:t>교육과정이란 목표와 일정한 순서로 배열된 학습의 코스와 더불어 교육내용이나 경험내용을 의미합니다.
-이귀윤(1990)에 따르면 교사를 중심으로 보면 가르치는 내용, 교과, 의도적 계획으로 정의되고, 배우는 학생을 중심으로 보면 학습경험 또는 학습 결과로 정의됩니다.
-방인옥 등(1999)은 교육과정을 "학습자의 전인적 성장과 발달을 돕기 위해서 학교가 의미하는 교육적 상황을 마련하고 모든 종류의 교수-학습 경험을 체계적으로 구성한 설계도"라고 정의했습니다.
-넓은 의미로는 학생이 경험하는 모든 것, 좁은 의미로는 계획된 교과목 또는 교수요목을 말합니다.</a:t>
+              <a:t>교육과정이라는 말, 많이 들어 보셨죠? 간단히 말하면 '무엇을, 어떤 순서로 가르치고 배울지 정리한 것'입니다.
+그런데 누구 입장에서 보느냐에 따라 뜻이 조금 달라져요. 선생님 입장에서 보면 '가르칠 내용과 계획'이고, 학생 입장에서 보면 '실제로 배우고 경험한 것'입니다(이귀윤, 1990).
+오른쪽 그림을 보시면, 넓게 보면 학생이 경험하는 모든 것이 교육과정이고, 좁게 보면 미리 짜 놓은 과목이나 수업 계획만을 말합니다.
+방인옥 등(1999)은 교육과정을 '아이가 몸과 마음 모두 골고루 자라도록 돕기 위해, 가르치고 배우는 경험을 잘 짜 놓은 설계도'라고 했습니다. 집을 지을 때 설계도가 필요하듯이, 교육에도 설계도가 필요하다는 뜻이에요.</a:t>
             </a:r>
             <a:endParaRPr lang="en-US" dirty="0"/>
           </a:p>
@@ -686,9 +688,11 @@
           <a:p>
             <a:r>
               <a:rPr lang="en-US" dirty="0"/>
-              <a:t>우리나라 유치원교육과정은 1969년 처음 제정된 이후 2007년까지 여섯 차례 개정되었습니다.
-현재는 유치원과 어린이집 3~5세를 위한 공통교육과정인 누리과정을 시행하고 있습니다. 누리과정은 그동안 이원화되어 있던 유치원교육과정과 어린이집 표준보육과정을 일원화하여, 취학 전 교육의 질을 높이고 생애초기 출발점 평등을 보장하려는 취지로 개발되었습니다(교육과학기술부·보건복지부, 2012; 2013; 2019).
-2013년에는 만 3~5세 유아를 위한 누리과정이 시행되었고, 2020년부터는 유아중심·놀이중심의 개정 누리과정이 적용되고 있습니다.</a:t>
+              <a:t>그럼 유치원 교육과정은 어떻게 바뀌어 왔을까요?
+우리나라 유치원 교육과정은 1969년에 처음 만들어졌고, 2007년까지 모두 여섯 번 고쳐졌습니다.
+그런데 예전에는 유치원은 유치원 교육과정, 어린이집은 표준보육과정, 이렇게 따로따로였어요. 같은 나이의 아이인데도 다니는 곳에 따라 배우는 내용이 달랐던 거죠.
+그래서 둘을 하나로 합친 것이 바로 '누리과정'입니다. 목적은 두 가지예요. 첫째, 초등학교에 들어가기 전 교육의 질을 높이는 것. 둘째, 어디에 다니든 모든 아이가 같은 출발선에서 시작할 수 있게 하는 것입니다.
+누리과정은 2013년부터 만 3~5세 아이들에게 적용되었고, 2020년부터는 '아이 중심, 놀이 중심'으로 바뀐 개정 누리과정을 쓰고 있습니다.</a:t>
             </a:r>
             <a:endParaRPr lang="en-US" dirty="0"/>
           </a:p>
@@ -776,9 +780,10 @@
           <a:p>
             <a:r>
               <a:rPr lang="en-US" dirty="0"/>
-              <a:t>어린이집은 국가수준 보육과정으로 표준보육과정이 보급되었습니다. 표준보육과정은 어린이집에서 영유아가 경험해야 할 바람직한 태도와 가치, 지식, 기술 등을 제시한 국가수준의 보편적 교육과정입니다.
-1990년대 후반 어린이집이 양적으로 늘어난 것과 관련이 있습니다. 핵가족화, 취업모의 증가, 그리고 출생 후 조기 경험이 발달에 결정적이라는 인식이 커지면서 어린이집 이용이 보편화되었고, 보육은 사회적 계층이나 부모의 취업 여부와 관계없이 모든 영유아에게 보호와 교육을 제공하는 것으로 바뀌었습니다. 그래서 국가수준의 지침이 필요해졌습니다.
-2004년 1월 29일 전면 개정된 영유아보육법 제29조 제2항에 표준보육과정 개발·보급이 명시되었고, 2007년 공포, 2013년 제3차 개정(보건복지부, 2013b), 2020년 제4차 고시(보건복지부, 2020)가 이루어졌습니다. 2025년에는 유보통합 실행계획(안)에 따라 0~5세 영유아교육과정이 마련되기 전, 2024 개정 표준보육과정(0~2세)이 고시되었습니다.</a:t>
+              <a:t>이번에는 어린이집의 표준보육과정입니다. 표준보육과정은 어린이집에서 아이들이 배우고 경험해야 할 것을 나라에서 정해 놓은 기준이에요.
+왜 필요해졌을까요? 1990년대 후반부터 어린이집이 크게 늘었습니다. 핵가족이 많아지고, 일하는 엄마들도 계속 늘었고, 어릴 때의 경험이 아이 발달에 아주 중요하다는 생각도 커졌기 때문이에요.
+이제 어린이집은 일부 가정만 보내는 곳이 아니라, 누구나 다니는 곳이 되었습니다. 그러다 보니 '어린이집마다 제각각 하지 말고, 나라에서 공통 기준을 정해 주자'는 필요가 생긴 거죠.
+그래서 2004년 영유아보육법에 '표준보육과정을 만들어 보급해야 한다'는 내용이 들어갔고, 2007년에 처음 발표되었습니다. 이후 2013년에 3차, 2020년에 4차로 바뀌었고, 2025년에는 0~2세 아이들을 위한 2024 개정 표준보육과정이 나왔습니다.</a:t>
             </a:r>
             <a:endParaRPr lang="en-US" dirty="0"/>
           </a:p>
@@ -866,12 +871,11 @@
           <a:p>
             <a:r>
               <a:rPr lang="en-US" dirty="0"/>
-              <a:t>유치원과 어린이집의 공통교육과정인 2019 개정 누리과정은 교육부가 출발선 평등을 실현하기 위한 "유아교육 혁신방안"에 의거해 개정한 것입니다.
-혁신 방향은 세 가지입니다.
-첫째, 초등학교 준비 위주의 학습보다는 개별 유아의 다양한 특성을 고려한 내용으로 구성해야 한다.
-둘째, 교사계획서 위주, 학습 위주의 교육보다는 유아의 자유놀이를 권장하며 관찰과 기록 등 유아와의 상호작용을 강조해야 한다.
-셋째, 5개 영역, 주제-소주제 등 구성체계가 지나치게 세부적이므로 현장의 자율성을 존중하기 위해 세부내용을 삭제해야 한다(교육부, 2017).
-이 방향을 반영해 "유아 중심·놀이 중심 교육과정"으로 개정된 누리과정이 2020년부터 유치원과 어린이집 공통교육과정으로 적용되고 있습니다.</a:t>
+              <a:t>그럼 지금 쓰고 있는 2019 개정 누리과정은 무엇이 달라졌을까요? 모든 아이가 같은 출발선에서 시작하게 하자는 교육부의 계획(교육부, 2017)에 따라 바뀌었고, 크게 세 가지가 달라졌습니다.
+첫째, 초등학교 공부를 미리 준비시키는 대신, 아이 한 명 한 명의 특성을 살피도록 했습니다.
+둘째, 선생님이 짜 놓은 계획대로 가르치기보다 아이들이 자유롭게 놀게 하고, 선생님은 옆에서 잘 지켜보고 기록하면서 함께하도록 했습니다.
+셋째, 예전에는 5개 영역, 주제, 소주제처럼 너무 자세하게 정해져 있었는데, 이것을 줄여서 현장 선생님들이 상황에 맞게 판단할 수 있게 했습니다.
+한마디로 '아이 중심, 놀이 중심'이고, 2020년부터 유치원과 어린이집 모두에서 쓰이고 있습니다.</a:t>
             </a:r>
             <a:endParaRPr lang="en-US" dirty="0"/>
           </a:p>
@@ -959,11 +963,12 @@
           <a:p>
             <a:r>
               <a:rPr lang="en-US" dirty="0"/>
-              <a:t>정리하겠습니다. 현재 0~2세 영아는 어린이집 표준보육과정을, 3~5세 유아는 유치원과 어린이집 공통의 누리과정을 따릅니다.
-첫째, 교육과정은 학습자의 전인적 성장과 발달을 위한 교수-학습 경험의 설계도입니다.
-둘째, 누리과정은 이원화되어 있던 유치원교육과정과 표준보육과정을 일원화해 교육의 질과 출발점 평등을 보장하려는 것입니다.
-셋째, 2019 개정 누리과정은 유아 중심·놀이 중심으로, 현장의 자율성을 존중합니다.
-이상으로 발표를 마치겠습니다. 감사합니다.</a:t>
+              <a:t>마지막으로 정리하겠습니다. 지금 0~2세 아이들은 어린이집 표준보육과정을, 3~5세 아이들은 유치원이든 어린이집이든 똑같이 누리과정을 따릅니다.
+세 가지만 기억해 주세요.
+하나, 교육과정은 아이가 골고루 자라도록 돕는 교육의 설계도입니다.
+둘, 누리과정은 따로 있던 유치원과 어린이집의 교육과정을 하나로 합친 것입니다.
+셋, 2019 개정 누리과정의 핵심은 아이 중심, 놀이 중심입니다.
+이상으로 발표를 마치겠습니다. 들어 주셔서 감사합니다.</a:t>
             </a:r>
             <a:endParaRPr lang="en-US" dirty="0"/>
           </a:p>

--- a/slides/영유아교육과정의_이해.pptx
+++ b/slides/영유아교육과정의_이해.pptx
@@ -507,9 +507,8 @@
           <a:p>
             <a:r>
               <a:rPr lang="en-US" dirty="0"/>
-              <a:t>안녕하세요. 오늘 제가 발표할 내용은 '영유아교육과정의 이해'입니다.
-쉽게 말하면, 유치원과 어린이집에서 아이들에게 '무엇을, 어떻게 가르칠지' 정해 놓은 계획에 대한 이야기예요.
-먼저 교육과정이 무슨 뜻인지 알아보고, 유치원과 어린이집의 교육과정이 어떻게 바뀌어 왔는지 살펴본 뒤, 마지막으로 요즘 누리과정이 어떤 방향인지 말씀드리겠습니다.</a:t>
+              <a:t>안녕하세요. 오늘 발표할 내용은 '영유아교육과정의 이해'입니다.
+교육과정의 정의, 유치원교육과정과 누리과정, 어린이집 표준보육과정, 그리고 2019 개정 누리과정의 혁신 방향 순서로 발표하겠습니다.</a:t>
             </a:r>
             <a:endParaRPr lang="en-US" dirty="0"/>
           </a:p>
@@ -597,10 +596,10 @@
           <a:p>
             <a:r>
               <a:rPr lang="en-US" dirty="0"/>
-              <a:t>교육과정이라는 말, 많이 들어 보셨죠? 간단히 말하면 '무엇을, 어떤 순서로 가르치고 배울지 정리한 것'입니다.
-그런데 누구 입장에서 보느냐에 따라 뜻이 조금 달라져요. 선생님 입장에서 보면 '가르칠 내용과 계획'이고, 학생 입장에서 보면 '실제로 배우고 경험한 것'입니다(이귀윤, 1990).
-오른쪽 그림을 보시면, 넓게 보면 학생이 경험하는 모든 것이 교육과정이고, 좁게 보면 미리 짜 놓은 과목이나 수업 계획만을 말합니다.
-방인옥 등(1999)은 교육과정을 '아이가 몸과 마음 모두 골고루 자라도록 돕기 위해, 가르치고 배우는 경험을 잘 짜 놓은 설계도'라고 했습니다. 집을 지을 때 설계도가 필요하듯이, 교육에도 설계도가 필요하다는 뜻이에요.</a:t>
+              <a:t>유치원과 어린이집 운영의 가장 기본적인 목적은 영유아를 교육하기 위한 우수한 교육과정을 운영하는 것입니다.
+교육과정이란 목표와 일정한 순서로 배열된 학습의 코스와 더불어 교육내용이나 경험내용을 의미합니다. 이는 교사를 중심으로 보면 가르치는 내용이나 교과 혹은 의도적 계획으로 정의되며, 배우는 학생을 중심으로 보면 학습경험 또는 학습 결과로 정의됩니다(이귀윤, 1990).
+또한 방인옥 등(1999)은 교육과정을 '학습자의 전인적 성장과 발달을 돕기 위해서 학교가 의미하는 교육적 상황을 마련하고 모든 종류의 교수-학습 경험을 체계적으로 구성한 설계도'라고 정의하고 있습니다.
+넓은 의미로는 '학생이 경험하는 모든 것'이라고 정의하기도 하고, 좁은 의미로는 '계획된 교과목 또는 교수요목'으로 정의하기도 합니다.</a:t>
             </a:r>
             <a:endParaRPr lang="en-US" dirty="0"/>
           </a:p>
@@ -688,11 +687,9 @@
           <a:p>
             <a:r>
               <a:rPr lang="en-US" dirty="0"/>
-              <a:t>그럼 유치원 교육과정은 어떻게 바뀌어 왔을까요?
-우리나라 유치원 교육과정은 1969년에 처음 만들어졌고, 2007년까지 모두 여섯 번 고쳐졌습니다.
-그런데 예전에는 유치원은 유치원 교육과정, 어린이집은 표준보육과정, 이렇게 따로따로였어요. 같은 나이의 아이인데도 다니는 곳에 따라 배우는 내용이 달랐던 거죠.
-그래서 둘을 하나로 합친 것이 바로 '누리과정'입니다. 목적은 두 가지예요. 첫째, 초등학교에 들어가기 전 교육의 질을 높이는 것. 둘째, 어디에 다니든 모든 아이가 같은 출발선에서 시작할 수 있게 하는 것입니다.
-누리과정은 2013년부터 만 3~5세 아이들에게 적용되었고, 2020년부터는 '아이 중심, 놀이 중심'으로 바뀐 개정 누리과정을 쓰고 있습니다.</a:t>
+              <a:t>우리나라 유치원교육과정은 1969년 처음으로 제정된 이후 2007년에 이르기까지 여섯 차례 개정되었습니다.
+현재는 유치원과 어린이집 3~5세를 위한 공통교육과정으로 누리과정을 시행하고 있습니다. 누리과정은 지금까지 이원화되어 있는 유치원교육과정과 어린이집 표준보육과정을 일원화하여 취학 전 교육의 질을 제고하여, 생애초기 출발점 평등을 보장하려는 취지로 개발된 것입니다(교육과학기술부·보건복지부, 2012; 2013; 2019).
+2013년에는 유치원과 어린이집 교육·보육과정을 통합하여 만 3~5세 유아를 위한 누리과정이 시행되었으며, 2020년부터 유아중심·놀이중심의 개정 누리과정이 적용되고 있습니다.</a:t>
             </a:r>
             <a:endParaRPr lang="en-US" dirty="0"/>
           </a:p>
@@ -780,10 +777,10 @@
           <a:p>
             <a:r>
               <a:rPr lang="en-US" dirty="0"/>
-              <a:t>이번에는 어린이집의 표준보육과정입니다. 표준보육과정은 어린이집에서 아이들이 배우고 경험해야 할 것을 나라에서 정해 놓은 기준이에요.
-왜 필요해졌을까요? 1990년대 후반부터 어린이집이 크게 늘었습니다. 핵가족이 많아지고, 일하는 엄마들도 계속 늘었고, 어릴 때의 경험이 아이 발달에 아주 중요하다는 생각도 커졌기 때문이에요.
-이제 어린이집은 일부 가정만 보내는 곳이 아니라, 누구나 다니는 곳이 되었습니다. 그러다 보니 '어린이집마다 제각각 하지 말고, 나라에서 공통 기준을 정해 주자'는 필요가 생긴 거죠.
-그래서 2004년 영유아보육법에 '표준보육과정을 만들어 보급해야 한다'는 내용이 들어갔고, 2007년에 처음 발표되었습니다. 이후 2013년에 3차, 2020년에 4차로 바뀌었고, 2025년에는 0~2세 아이들을 위한 2024 개정 표준보육과정이 나왔습니다.</a:t>
+              <a:t>어린이집은 국가수준 보육과정으로 표준보육과정이 보급되었습니다. 표준보육과정이란 어린이집에서 영유아가 경험해야 할 바람직한 태도와 가치, 지식, 기술 등을 제시한 국가수준의 보편적 교육과정입니다.
+표준보육과정의 개발은 1990년대 후반 어린이집의 양적인 증가와 관련되어 있습니다. 핵가족화와 취업모의 지속적인 증가, 그리고 출생 후 조기 경험이 인간의 발달에 결정적이라는 영유아기 교육에 대한 중요성이 더욱 부각되면서 영유아가 어린이집에 다니는 것이 보편화되었습니다. 이에 어린이집에서 영유아에게 언제, 무엇을 목표로 어떤 경험을 제공할 것인가에 대한 국가수준의 지침이 필요하게 되었습니다.
+2004년 1월 29일 전면 개정된 영유아보육법 제29조 제2항에 표준보육과정을 개발, 보급하여야 함이 명시되었습니다. 2007년에 표준보육과정이 공포되었으며, 이후 2013년에 제3차 어린이집 표준보육과정으로 개정되고(보건복지부, 2013b), 2020년에는 제4차 어린이집 표준보육과정이 고시되었습니다(보건복지부, 2020).
+그리고 2025년에는 「유보통합 실행계획(안)」에서 0~5세 영유아교육과정이 마련되기 전에 표준보육과정(0~2세)의 일부개정의 필요성에 따라 2024 개정 표준보육과정(0~2세)이 고시되었습니다.</a:t>
             </a:r>
             <a:endParaRPr lang="en-US" dirty="0"/>
           </a:p>
@@ -871,11 +868,12 @@
           <a:p>
             <a:r>
               <a:rPr lang="en-US" dirty="0"/>
-              <a:t>그럼 지금 쓰고 있는 2019 개정 누리과정은 무엇이 달라졌을까요? 모든 아이가 같은 출발선에서 시작하게 하자는 교육부의 계획(교육부, 2017)에 따라 바뀌었고, 크게 세 가지가 달라졌습니다.
-첫째, 초등학교 공부를 미리 준비시키는 대신, 아이 한 명 한 명의 특성을 살피도록 했습니다.
-둘째, 선생님이 짜 놓은 계획대로 가르치기보다 아이들이 자유롭게 놀게 하고, 선생님은 옆에서 잘 지켜보고 기록하면서 함께하도록 했습니다.
-셋째, 예전에는 5개 영역, 주제, 소주제처럼 너무 자세하게 정해져 있었는데, 이것을 줄여서 현장 선생님들이 상황에 맞게 판단할 수 있게 했습니다.
-한마디로 '아이 중심, 놀이 중심'이고, 2020년부터 유치원과 어린이집 모두에서 쓰이고 있습니다.</a:t>
+              <a:t>유치원과 어린이집의 공통교육과정인 2019 개정 누리과정은 교육부가 출발선 평등을 실현하기 위한 '유아교육 혁신방안'에 의거하여 개정된 것입니다.
+혁신방향은 다음과 같습니다.
+첫째, 초등학교 준비 위주의 학습보다는 개별 유아에 대한 다양한 특성을 고려한 내용으로 구성해야 한다.
+둘째, 교사계획서 위주, 학습 위주의 교육보다는 유아의 자유놀이를 권장하며 관찰과 기록 등 유아와의 상호작용을 강조해야 한다.
+셋째, 5개 영역, 주제-소주제 등 구성체계가 지나치게 세부적이므로 현장의 자율성을 존중하기 위해 세부내용을 삭제해야 한다(교육부, 2017).
+이와 같은 방향을 반영하여 '유아 중심·놀이 중심 교육과정'으로 개정된 누리과정은 2020년부터 유치원과 어린이집 공통교육과정으로 적용되고 있습니다.</a:t>
             </a:r>
             <a:endParaRPr lang="en-US" dirty="0"/>
           </a:p>
@@ -963,12 +961,9 @@
           <a:p>
             <a:r>
               <a:rPr lang="en-US" dirty="0"/>
-              <a:t>마지막으로 정리하겠습니다. 지금 0~2세 아이들은 어린이집 표준보육과정을, 3~5세 아이들은 유치원이든 어린이집이든 똑같이 누리과정을 따릅니다.
-세 가지만 기억해 주세요.
-하나, 교육과정은 아이가 골고루 자라도록 돕는 교육의 설계도입니다.
-둘, 누리과정은 따로 있던 유치원과 어린이집의 교육과정을 하나로 합친 것입니다.
-셋, 2019 개정 누리과정의 핵심은 아이 중심, 놀이 중심입니다.
-이상으로 발표를 마치겠습니다. 들어 주셔서 감사합니다.</a:t>
+              <a:t>정리하겠습니다. 0~2세는 어린이집 표준보육과정, 3~5세는 유치원과 어린이집의 공통교육과정인 누리과정이 적용됩니다.
+교육과정은 학습자의 전인적 성장과 발달을 돕기 위해 모든 종류의 교수-학습 경험을 체계적으로 구성한 설계도입니다. 누리과정은 이원화되어 있던 유치원교육과정과 어린이집 표준보육과정을 일원화하여 취학 전 교육의 질을 제고하고 생애초기 출발점 평등을 보장하려는 취지로 개발되었습니다. 그리고 2019 개정 누리과정은 '유아 중심·놀이 중심 교육과정'으로 개정되었습니다.
+이상으로 발표를 마치겠습니다. 감사합니다.</a:t>
             </a:r>
             <a:endParaRPr lang="en-US" dirty="0"/>
           </a:p>
@@ -2325,12 +2320,12 @@
         </p:nvSpPr>
         <p:spPr>
           <a:xfrm>
-            <a:off x="457200" y="3840480"/>
-            <a:ext cx="8229600" cy="868680"/>
+            <a:off x="457200" y="3703320"/>
+            <a:ext cx="8229600" cy="1051560"/>
           </a:xfrm>
           <a:prstGeom prst="roundRect">
             <a:avLst>
-              <a:gd name="adj" fmla="val 12632"/>
+              <a:gd name="adj" fmla="val 10435"/>
             </a:avLst>
           </a:prstGeom>
           <a:solidFill>
@@ -2347,8 +2342,8 @@
         </p:nvSpPr>
         <p:spPr>
           <a:xfrm>
-            <a:off x="685800" y="3931920"/>
-            <a:ext cx="7772400" cy="411480"/>
+            <a:off x="685800" y="3767328"/>
+            <a:ext cx="7772400" cy="640080"/>
           </a:xfrm>
           <a:prstGeom prst="rect">
             <a:avLst/>
@@ -2364,7 +2359,21 @@
               <a:buNone/>
             </a:pPr>
             <a:r>
-              <a:rPr lang="en-US" sz="1600" b="1" dirty="0">
+              <a:rPr lang="en-US" sz="1300" dirty="0">
+                <a:solidFill>
+                  <a:srgbClr val="33413A"/>
+                </a:solidFill>
+                <a:latin typeface="Malgun Gothic" pitchFamily="34" charset="0"/>
+                <a:ea typeface="Malgun Gothic" pitchFamily="34" charset="-122"/>
+                <a:cs typeface="Malgun Gothic" pitchFamily="34" charset="-120"/>
+              </a:rPr>
+              <a:t>"학습자의 전인적 성장과 발달을 돕기 위해서 학교가 의미하는 교육적 상황을 마련하고 모든 종류의 교수-학습 경험을 체계적으로 구성한 </a:t>
+            </a:r>
+            <a:pPr indent="0" marL="0">
+              <a:buNone/>
+            </a:pPr>
+            <a:r>
+              <a:rPr lang="en-US" sz="1300" b="1" dirty="0">
                 <a:solidFill>
                   <a:srgbClr val="5E8C6A"/>
                 </a:solidFill>
@@ -2372,13 +2381,13 @@
                 <a:ea typeface="Malgun Gothic" pitchFamily="34" charset="-122"/>
                 <a:cs typeface="Malgun Gothic" pitchFamily="34" charset="-120"/>
               </a:rPr>
-              <a:t>교육과정 = </a:t>
-            </a:r>
-            <a:pPr indent="0" marL="0">
-              <a:buNone/>
-            </a:pPr>
-            <a:r>
-              <a:rPr lang="en-US" sz="1600" dirty="0">
+              <a:t>설계도</a:t>
+            </a:r>
+            <a:pPr indent="0" marL="0">
+              <a:buNone/>
+            </a:pPr>
+            <a:r>
+              <a:rPr lang="en-US" sz="1300" dirty="0">
                 <a:solidFill>
                   <a:srgbClr val="33413A"/>
                 </a:solidFill>
@@ -2386,23 +2395,9 @@
                 <a:ea typeface="Malgun Gothic" pitchFamily="34" charset="-122"/>
                 <a:cs typeface="Malgun Gothic" pitchFamily="34" charset="-120"/>
               </a:rPr>
-              <a:t>전인적 성장·발달을 돕는 교수-학습 경험의 체계적 </a:t>
-            </a:r>
-            <a:pPr indent="0" marL="0">
-              <a:buNone/>
-            </a:pPr>
-            <a:r>
-              <a:rPr lang="en-US" sz="1600" b="1" dirty="0">
-                <a:solidFill>
-                  <a:srgbClr val="5E8C6A"/>
-                </a:solidFill>
-                <a:latin typeface="Malgun Gothic" pitchFamily="34" charset="0"/>
-                <a:ea typeface="Malgun Gothic" pitchFamily="34" charset="-122"/>
-                <a:cs typeface="Malgun Gothic" pitchFamily="34" charset="-120"/>
-              </a:rPr>
-              <a:t>설계도</a:t>
-            </a:r>
-            <a:endParaRPr lang="en-US" sz="1600" dirty="0"/>
+              <a:t>"</a:t>
+            </a:r>
+            <a:endParaRPr lang="en-US" sz="1300" dirty="0"/>
           </a:p>
         </p:txBody>
       </p:sp>
@@ -2414,8 +2409,8 @@
         </p:nvSpPr>
         <p:spPr>
           <a:xfrm>
-            <a:off x="685800" y="4343400"/>
-            <a:ext cx="7772400" cy="274320"/>
+            <a:off x="685800" y="4434840"/>
+            <a:ext cx="7772400" cy="256032"/>
           </a:xfrm>
           <a:prstGeom prst="rect">
             <a:avLst/>
@@ -3547,7 +3542,7 @@
                 <a:ea typeface="Malgun Gothic" pitchFamily="34" charset="-122"/>
                 <a:cs typeface="Malgun Gothic" pitchFamily="34" charset="-120"/>
               </a:rPr>
-              <a:t>왜 필요해졌을까?</a:t>
+              <a:t>표준보육과정 개발의 배경</a:t>
             </a:r>
             <a:endParaRPr lang="en-US" sz="1500" dirty="0"/>
           </a:p>
@@ -3713,7 +3708,7 @@
                 <a:ea typeface="Malgun Gothic" pitchFamily="34" charset="-122"/>
                 <a:cs typeface="Malgun Gothic" pitchFamily="34" charset="-120"/>
               </a:rPr>
-              <a:t>취업모의 지속적 증가</a:t>
+              <a:t>취업모의 지속적인 증가</a:t>
             </a:r>
             <a:endParaRPr lang="en-US" sz="1500" dirty="0"/>
           </a:p>
@@ -3796,7 +3791,7 @@
                 <a:ea typeface="Malgun Gothic" pitchFamily="34" charset="-122"/>
                 <a:cs typeface="Malgun Gothic" pitchFamily="34" charset="-120"/>
               </a:rPr>
-              <a:t>조기 경험의 중요성 부각</a:t>
+              <a:t>영유아기 교육의 중요성 부각</a:t>
             </a:r>
             <a:endParaRPr lang="en-US" sz="1500" dirty="0"/>
           </a:p>
@@ -3860,7 +3855,7 @@
                 <a:ea typeface="Malgun Gothic" pitchFamily="34" charset="-122"/>
                 <a:cs typeface="Malgun Gothic" pitchFamily="34" charset="-120"/>
               </a:rPr>
-              <a:t>어린이집 이용의 보편화</a:t>
+              <a:t>영유아가 어린이집에 다니는 것이 보편화</a:t>
             </a:r>
             <a:endParaRPr lang="en-US" sz="1300" dirty="0"/>
           </a:p>
@@ -3880,11 +3875,8 @@
                 <a:ea typeface="Malgun Gothic" pitchFamily="34" charset="-122"/>
                 <a:cs typeface="Malgun Gothic" pitchFamily="34" charset="-120"/>
               </a:rPr>
-              <a:t>언제, 무엇을 목표로, 어떤 경험을 줄지</a:t>
-            </a:r>
-            <a:endParaRPr lang="en-US" sz="1300" dirty="0"/>
-          </a:p>
-          <a:p>
+              <a:t>→ 언제, 무엇을 목표로 어떤 경험을 제공할 것인가에 대한 </a:t>
+            </a:r>
             <a:pPr indent="0" marL="0">
               <a:spcAft>
                 <a:spcPts val="400"/>
@@ -3892,15 +3884,15 @@
               <a:buNone/>
             </a:pPr>
             <a:r>
-              <a:rPr lang="en-US" sz="1300" dirty="0">
-                <a:solidFill>
-                  <a:srgbClr val="33413A"/>
-                </a:solidFill>
-                <a:latin typeface="Malgun Gothic" pitchFamily="34" charset="0"/>
-                <a:ea typeface="Malgun Gothic" pitchFamily="34" charset="-122"/>
-                <a:cs typeface="Malgun Gothic" pitchFamily="34" charset="-120"/>
-              </a:rPr>
-              <a:t>→ </a:t>
+              <a:rPr lang="en-US" sz="1300" b="1" dirty="0">
+                <a:solidFill>
+                  <a:srgbClr val="5E8C6A"/>
+                </a:solidFill>
+                <a:latin typeface="Malgun Gothic" pitchFamily="34" charset="0"/>
+                <a:ea typeface="Malgun Gothic" pitchFamily="34" charset="-122"/>
+                <a:cs typeface="Malgun Gothic" pitchFamily="34" charset="-120"/>
+              </a:rPr>
+              <a:t>국가수준의 지침</a:t>
             </a:r>
             <a:pPr indent="0" marL="0">
               <a:spcAft>
@@ -3909,23 +3901,6 @@
               <a:buNone/>
             </a:pPr>
             <a:r>
-              <a:rPr lang="en-US" sz="1300" b="1" dirty="0">
-                <a:solidFill>
-                  <a:srgbClr val="5E8C6A"/>
-                </a:solidFill>
-                <a:latin typeface="Malgun Gothic" pitchFamily="34" charset="0"/>
-                <a:ea typeface="Malgun Gothic" pitchFamily="34" charset="-122"/>
-                <a:cs typeface="Malgun Gothic" pitchFamily="34" charset="-120"/>
-              </a:rPr>
-              <a:t>국가수준의 지침</a:t>
-            </a:r>
-            <a:pPr indent="0" marL="0">
-              <a:spcAft>
-                <a:spcPts val="400"/>
-              </a:spcAft>
-              <a:buNone/>
-            </a:pPr>
-            <a:r>
               <a:rPr lang="en-US" sz="1300" dirty="0">
                 <a:solidFill>
                   <a:srgbClr val="33413A"/>
@@ -3934,7 +3909,7 @@
                 <a:ea typeface="Malgun Gothic" pitchFamily="34" charset="-122"/>
                 <a:cs typeface="Malgun Gothic" pitchFamily="34" charset="-120"/>
               </a:rPr>
-              <a:t>이 필요해짐</a:t>
+              <a:t> 필요</a:t>
             </a:r>
             <a:endParaRPr lang="en-US" sz="1300" dirty="0"/>
           </a:p>
@@ -4055,7 +4030,7 @@
                 <a:ea typeface="Malgun Gothic" pitchFamily="34" charset="-122"/>
                 <a:cs typeface="Malgun Gothic" pitchFamily="34" charset="-120"/>
               </a:rPr>
-              <a:t>영유아보육법 제29조 제2항 개정</a:t>
+              <a:t>영유아보육법 전면 개정</a:t>
             </a:r>
             <a:endParaRPr lang="en-US" sz="1200" dirty="0"/>
           </a:p>
@@ -4072,7 +4047,7 @@
                 <a:ea typeface="Malgun Gothic" pitchFamily="34" charset="-122"/>
                 <a:cs typeface="Malgun Gothic" pitchFamily="34" charset="-120"/>
               </a:rPr>
-              <a:t>표준보육과정 개발·보급 명시</a:t>
+              <a:t>제29조 제2항에 개발·보급 명시</a:t>
             </a:r>
             <a:endParaRPr lang="en-US" sz="1200" dirty="0"/>
           </a:p>
@@ -4268,7 +4243,24 @@
                 <a:ea typeface="Malgun Gothic" pitchFamily="34" charset="-122"/>
                 <a:cs typeface="Malgun Gothic" pitchFamily="34" charset="-120"/>
               </a:rPr>
-              <a:t>제3차 표준보육과정 개정</a:t>
+              <a:t>제3차 어린이집 표준보육과정으로</a:t>
+            </a:r>
+            <a:endParaRPr lang="en-US" sz="1200" dirty="0"/>
+          </a:p>
+          <a:p>
+            <a:pPr indent="0" marL="0">
+              <a:buNone/>
+            </a:pPr>
+            <a:r>
+              <a:rPr lang="en-US" sz="1200" dirty="0">
+                <a:solidFill>
+                  <a:srgbClr val="33413A"/>
+                </a:solidFill>
+                <a:latin typeface="Malgun Gothic" pitchFamily="34" charset="0"/>
+                <a:ea typeface="Malgun Gothic" pitchFamily="34" charset="-122"/>
+                <a:cs typeface="Malgun Gothic" pitchFamily="34" charset="-120"/>
+              </a:rPr>
+              <a:t>개정</a:t>
             </a:r>
             <a:endParaRPr lang="en-US" sz="1200" dirty="0"/>
           </a:p>
@@ -4366,7 +4358,7 @@
                 <a:ea typeface="Malgun Gothic" pitchFamily="34" charset="-122"/>
                 <a:cs typeface="Malgun Gothic" pitchFamily="34" charset="-120"/>
               </a:rPr>
-              <a:t>제4차 표준보육과정 고시</a:t>
+              <a:t>제4차 어린이집 표준보육과정 고시</a:t>
             </a:r>
             <a:endParaRPr lang="en-US" sz="1200" dirty="0"/>
           </a:p>
@@ -4777,7 +4769,7 @@
                 <a:ea typeface="Malgun Gothic" pitchFamily="34" charset="-122"/>
                 <a:cs typeface="Malgun Gothic" pitchFamily="34" charset="-120"/>
               </a:rPr>
-              <a:t>초등학교 준비 위주 학습</a:t>
+              <a:t>초등학교 준비 위주의 학습</a:t>
             </a:r>
             <a:endParaRPr lang="en-US" sz="1100" dirty="0"/>
           </a:p>
@@ -4830,8 +4822,8 @@
         </p:nvSpPr>
         <p:spPr>
           <a:xfrm>
-            <a:off x="640080" y="3017520"/>
-            <a:ext cx="2194560" cy="777240"/>
+            <a:off x="640080" y="2999232"/>
+            <a:ext cx="2240280" cy="868680"/>
           </a:xfrm>
           <a:prstGeom prst="rect">
             <a:avLst/>
@@ -4847,7 +4839,7 @@
               <a:buNone/>
             </a:pPr>
             <a:r>
-              <a:rPr lang="en-US" sz="1400" b="1" dirty="0">
+              <a:rPr lang="en-US" sz="1300" b="1" dirty="0">
                 <a:solidFill>
                   <a:srgbClr val="33413A"/>
                 </a:solidFill>
@@ -4855,9 +4847,26 @@
                 <a:ea typeface="Malgun Gothic" pitchFamily="34" charset="-122"/>
                 <a:cs typeface="Malgun Gothic" pitchFamily="34" charset="-120"/>
               </a:rPr>
-              <a:t>개별 유아의 다양한 특성 고려</a:t>
-            </a:r>
-            <a:endParaRPr lang="en-US" sz="1400" dirty="0"/>
+              <a:t>개별 유아에 대한 다양한</a:t>
+            </a:r>
+            <a:endParaRPr lang="en-US" sz="1300" dirty="0"/>
+          </a:p>
+          <a:p>
+            <a:pPr indent="0" marL="0">
+              <a:buNone/>
+            </a:pPr>
+            <a:r>
+              <a:rPr lang="en-US" sz="1300" b="1" dirty="0">
+                <a:solidFill>
+                  <a:srgbClr val="33413A"/>
+                </a:solidFill>
+                <a:latin typeface="Malgun Gothic" pitchFamily="34" charset="0"/>
+                <a:ea typeface="Malgun Gothic" pitchFamily="34" charset="-122"/>
+                <a:cs typeface="Malgun Gothic" pitchFamily="34" charset="-120"/>
+              </a:rPr>
+              <a:t>특성을 고려한 내용</a:t>
+            </a:r>
+            <a:endParaRPr lang="en-US" sz="1300" dirty="0"/>
           </a:p>
         </p:txBody>
       </p:sp>
@@ -4999,7 +5008,7 @@
                 <a:ea typeface="Malgun Gothic" pitchFamily="34" charset="-122"/>
                 <a:cs typeface="Malgun Gothic" pitchFamily="34" charset="-120"/>
               </a:rPr>
-              <a:t>교사계획서·학습 위주 교육</a:t>
+              <a:t>교사계획서 위주, 학습 위주의 교육</a:t>
             </a:r>
             <a:endParaRPr lang="en-US" sz="1100" dirty="0"/>
           </a:p>
@@ -5052,8 +5061,8 @@
         </p:nvSpPr>
         <p:spPr>
           <a:xfrm>
-            <a:off x="3474720" y="3017520"/>
-            <a:ext cx="2194560" cy="777240"/>
+            <a:off x="3474720" y="2999232"/>
+            <a:ext cx="2240280" cy="868680"/>
           </a:xfrm>
           <a:prstGeom prst="rect">
             <a:avLst/>
@@ -5069,7 +5078,7 @@
               <a:buNone/>
             </a:pPr>
             <a:r>
-              <a:rPr lang="en-US" sz="1400" b="1" dirty="0">
+              <a:rPr lang="en-US" sz="1300" b="1" dirty="0">
                 <a:solidFill>
                   <a:srgbClr val="33413A"/>
                 </a:solidFill>
@@ -5077,16 +5086,16 @@
                 <a:ea typeface="Malgun Gothic" pitchFamily="34" charset="-122"/>
                 <a:cs typeface="Malgun Gothic" pitchFamily="34" charset="-120"/>
               </a:rPr>
-              <a:t>자유놀이 권장</a:t>
-            </a:r>
-            <a:endParaRPr lang="en-US" sz="1400" dirty="0"/>
-          </a:p>
-          <a:p>
-            <a:pPr indent="0" marL="0">
-              <a:buNone/>
-            </a:pPr>
-            <a:r>
-              <a:rPr lang="en-US" sz="1400" b="1" dirty="0">
+              <a:t>유아의 자유놀이 권장</a:t>
+            </a:r>
+            <a:endParaRPr lang="en-US" sz="1300" dirty="0"/>
+          </a:p>
+          <a:p>
+            <a:pPr indent="0" marL="0">
+              <a:buNone/>
+            </a:pPr>
+            <a:r>
+              <a:rPr lang="en-US" sz="1300" b="1" dirty="0">
                 <a:solidFill>
                   <a:srgbClr val="33413A"/>
                 </a:solidFill>
@@ -5094,9 +5103,26 @@
                 <a:ea typeface="Malgun Gothic" pitchFamily="34" charset="-122"/>
                 <a:cs typeface="Malgun Gothic" pitchFamily="34" charset="-120"/>
               </a:rPr>
-              <a:t>관찰·기록 등 상호작용 강조</a:t>
-            </a:r>
-            <a:endParaRPr lang="en-US" sz="1400" dirty="0"/>
+              <a:t>관찰과 기록 등 유아와의</a:t>
+            </a:r>
+            <a:endParaRPr lang="en-US" sz="1300" dirty="0"/>
+          </a:p>
+          <a:p>
+            <a:pPr indent="0" marL="0">
+              <a:buNone/>
+            </a:pPr>
+            <a:r>
+              <a:rPr lang="en-US" sz="1300" b="1" dirty="0">
+                <a:solidFill>
+                  <a:srgbClr val="33413A"/>
+                </a:solidFill>
+                <a:latin typeface="Malgun Gothic" pitchFamily="34" charset="0"/>
+                <a:ea typeface="Malgun Gothic" pitchFamily="34" charset="-122"/>
+                <a:cs typeface="Malgun Gothic" pitchFamily="34" charset="-120"/>
+              </a:rPr>
+              <a:t>상호작용 강조</a:t>
+            </a:r>
+            <a:endParaRPr lang="en-US" sz="1300" dirty="0"/>
           </a:p>
         </p:txBody>
       </p:sp>
@@ -5238,7 +5264,7 @@
                 <a:ea typeface="Malgun Gothic" pitchFamily="34" charset="-122"/>
                 <a:cs typeface="Malgun Gothic" pitchFamily="34" charset="-120"/>
               </a:rPr>
-              <a:t>5개 영역, 주제-소주제의</a:t>
+              <a:t>5개 영역, 주제-소주제 등</a:t>
             </a:r>
             <a:endParaRPr lang="en-US" sz="1100" dirty="0"/>
           </a:p>
@@ -5255,7 +5281,7 @@
                 <a:ea typeface="Malgun Gothic" pitchFamily="34" charset="-122"/>
                 <a:cs typeface="Malgun Gothic" pitchFamily="34" charset="-120"/>
               </a:rPr>
-              <a:t>지나치게 세부적인 구성</a:t>
+              <a:t>구성체계가 지나치게 세부적</a:t>
             </a:r>
             <a:endParaRPr lang="en-US" sz="1100" dirty="0"/>
           </a:p>
@@ -5308,8 +5334,8 @@
         </p:nvSpPr>
         <p:spPr>
           <a:xfrm>
-            <a:off x="6309360" y="3017520"/>
-            <a:ext cx="2194560" cy="777240"/>
+            <a:off x="6309360" y="2999232"/>
+            <a:ext cx="2240280" cy="868680"/>
           </a:xfrm>
           <a:prstGeom prst="rect">
             <a:avLst/>
@@ -5325,7 +5351,7 @@
               <a:buNone/>
             </a:pPr>
             <a:r>
-              <a:rPr lang="en-US" sz="1400" b="1" dirty="0">
+              <a:rPr lang="en-US" sz="1300" b="1" dirty="0">
                 <a:solidFill>
                   <a:srgbClr val="33413A"/>
                 </a:solidFill>
@@ -5333,16 +5359,16 @@
                 <a:ea typeface="Malgun Gothic" pitchFamily="34" charset="-122"/>
                 <a:cs typeface="Malgun Gothic" pitchFamily="34" charset="-120"/>
               </a:rPr>
-              <a:t>세부내용 삭제로</a:t>
-            </a:r>
-            <a:endParaRPr lang="en-US" sz="1400" dirty="0"/>
-          </a:p>
-          <a:p>
-            <a:pPr indent="0" marL="0">
-              <a:buNone/>
-            </a:pPr>
-            <a:r>
-              <a:rPr lang="en-US" sz="1400" b="1" dirty="0">
+              <a:t>현장의 자율성 존중을 위해</a:t>
+            </a:r>
+            <a:endParaRPr lang="en-US" sz="1300" dirty="0"/>
+          </a:p>
+          <a:p>
+            <a:pPr indent="0" marL="0">
+              <a:buNone/>
+            </a:pPr>
+            <a:r>
+              <a:rPr lang="en-US" sz="1300" b="1" dirty="0">
                 <a:solidFill>
                   <a:srgbClr val="33413A"/>
                 </a:solidFill>
@@ -5350,9 +5376,9 @@
                 <a:ea typeface="Malgun Gothic" pitchFamily="34" charset="-122"/>
                 <a:cs typeface="Malgun Gothic" pitchFamily="34" charset="-120"/>
               </a:rPr>
-              <a:t>현장의 자율성 존중</a:t>
-            </a:r>
-            <a:endParaRPr lang="en-US" sz="1400" dirty="0"/>
+              <a:t>세부내용 삭제</a:t>
+            </a:r>
+            <a:endParaRPr lang="en-US" sz="1300" dirty="0"/>
           </a:p>
         </p:txBody>
       </p:sp>
@@ -5403,7 +5429,7 @@
               <a:buNone/>
             </a:pPr>
             <a:r>
-              <a:rPr lang="en-US" sz="1700" b="1" dirty="0">
+              <a:rPr lang="en-US" sz="1400" b="1" dirty="0">
                 <a:solidFill>
                   <a:srgbClr val="FFFFFF"/>
                 </a:solidFill>
@@ -5411,9 +5437,9 @@
                 <a:ea typeface="Malgun Gothic" pitchFamily="34" charset="-122"/>
                 <a:cs typeface="Malgun Gothic" pitchFamily="34" charset="-120"/>
               </a:rPr>
-              <a:t>유아 중심 · 놀이 중심 교육과정  →  2020년부터 유치원·어린이집 공통 적용</a:t>
-            </a:r>
-            <a:endParaRPr lang="en-US" sz="1700" dirty="0"/>
+              <a:t>'유아 중심·놀이 중심 교육과정'  →  2020년부터 유치원과 어린이집 공통교육과정으로 적용</a:t>
+            </a:r>
+            <a:endParaRPr lang="en-US" sz="1400" dirty="0"/>
           </a:p>
         </p:txBody>
       </p:sp>
@@ -5819,7 +5845,7 @@
                 <a:ea typeface="Malgun Gothic" pitchFamily="34" charset="-122"/>
                 <a:cs typeface="Malgun Gothic" pitchFamily="34" charset="-120"/>
               </a:rPr>
-              <a:t>학습자의 전인적 성장·발달을 위한 교수-학습 경험의 설계도</a:t>
+              <a:t>학습자의 전인적 성장과 발달을 돕기 위한 교수-학습 경험의 설계도</a:t>
             </a:r>
             <a:endParaRPr lang="en-US" sz="1400" dirty="0"/>
           </a:p>
@@ -5956,7 +5982,7 @@
                 <a:ea typeface="Malgun Gothic" pitchFamily="34" charset="-122"/>
                 <a:cs typeface="Malgun Gothic" pitchFamily="34" charset="-120"/>
               </a:rPr>
-              <a:t>이원화된 과정을 일원화해 교육의 질과 출발점 평등을 보장</a:t>
+              <a:t>유치원교육과정과 표준보육과정 일원화, 생애초기 출발점 평등 보장</a:t>
             </a:r>
             <a:endParaRPr lang="en-US" sz="1400" dirty="0"/>
           </a:p>
@@ -6093,7 +6119,7 @@
                 <a:ea typeface="Malgun Gothic" pitchFamily="34" charset="-122"/>
                 <a:cs typeface="Malgun Gothic" pitchFamily="34" charset="-120"/>
               </a:rPr>
-              <a:t>유아 중심·놀이 중심, 현장의 자율성 존중</a:t>
+              <a:t>'유아 중심·놀이 중심 교육과정'으로 개정</a:t>
             </a:r>
             <a:endParaRPr lang="en-US" sz="1400" dirty="0"/>
           </a:p>
